--- a/docs/presentaciones/classes/clase-138-1d-cnns-y-wavenet-presentacion.pptx
+++ b/docs/presentaciones/classes/clase-138-1d-cnns-y-wavenet-presentacion.pptx
@@ -4888,7 +4888,178 @@
                 </a:solidFill>
                 <a:latin typeface="Courier New"/>
               </a:rPr>
-              <a:t># Imports y configuración inicial</a:t>
+              <a:t>import numpy as np</a:t>
+            </a:r>
+          </a:p>
+          <a:p>
+            <a:pPr>
+              <a:defRPr sz="1200" b="0">
+                <a:solidFill>
+                  <a:srgbClr val="F8FAFC"/>
+                </a:solidFill>
+                <a:latin typeface="Courier New"/>
+              </a:defRPr>
+            </a:pPr>
+            <a:r>
+              <a:rPr sz="1200" b="0">
+                <a:solidFill>
+                  <a:srgbClr val="F8FAFC"/>
+                </a:solidFill>
+                <a:latin typeface="Courier New"/>
+              </a:rPr>
+              <a:t>from tensorflow import keras</a:t>
+            </a:r>
+          </a:p>
+          <a:p>
+            <a:pPr>
+              <a:defRPr sz="1200" b="0">
+                <a:solidFill>
+                  <a:srgbClr val="F8FAFC"/>
+                </a:solidFill>
+                <a:latin typeface="Courier New"/>
+              </a:defRPr>
+            </a:pPr>
+            <a:r>
+              <a:rPr sz="1200" b="0">
+                <a:solidFill>
+                  <a:srgbClr val="F8FAFC"/>
+                </a:solidFill>
+                <a:latin typeface="Courier New"/>
+              </a:rPr>
+              <a:t>from tensorflow.keras import layers</a:t>
+            </a:r>
+          </a:p>
+          <a:p>
+            <a:pPr>
+              <a:defRPr sz="1200" b="0">
+                <a:solidFill>
+                  <a:srgbClr val="F8FAFC"/>
+                </a:solidFill>
+                <a:latin typeface="Courier New"/>
+              </a:defRPr>
+            </a:pPr>
+            <a:r>
+              <a:rPr sz="1200" b="0">
+                <a:solidFill>
+                  <a:srgbClr val="F8FAFC"/>
+                </a:solidFill>
+                <a:latin typeface="Courier New"/>
+              </a:rPr>
+              <a:t>keras.utils.set_random_seed(42)</a:t>
+            </a:r>
+          </a:p>
+          <a:p>
+            <a:pPr>
+              <a:defRPr sz="1200" b="0">
+                <a:solidFill>
+                  <a:srgbClr val="F8FAFC"/>
+                </a:solidFill>
+                <a:latin typeface="Courier New"/>
+              </a:defRPr>
+            </a:pPr>
+            <a:r>
+              <a:rPr sz="1200" b="0">
+                <a:solidFill>
+                  <a:srgbClr val="F8FAFC"/>
+                </a:solidFill>
+                <a:latin typeface="Courier New"/>
+              </a:rPr>
+              <a:t>T, F = 64, 1</a:t>
+            </a:r>
+          </a:p>
+          <a:p>
+            <a:pPr>
+              <a:defRPr sz="1200" b="0">
+                <a:solidFill>
+                  <a:srgbClr val="F8FAFC"/>
+                </a:solidFill>
+                <a:latin typeface="Courier New"/>
+              </a:defRPr>
+            </a:pPr>
+            <a:r>
+              <a:rPr sz="1200" b="0">
+                <a:solidFill>
+                  <a:srgbClr val="F8FAFC"/>
+                </a:solidFill>
+                <a:latin typeface="Courier New"/>
+              </a:rPr>
+              <a:t>conv = keras.Sequential([</a:t>
+            </a:r>
+          </a:p>
+          <a:p>
+            <a:pPr>
+              <a:defRPr sz="1200" b="0">
+                <a:solidFill>
+                  <a:srgbClr val="F8FAFC"/>
+                </a:solidFill>
+                <a:latin typeface="Courier New"/>
+              </a:defRPr>
+            </a:pPr>
+            <a:r>
+              <a:rPr sz="1200" b="0">
+                <a:solidFill>
+                  <a:srgbClr val="F8FAFC"/>
+                </a:solidFill>
+                <a:latin typeface="Courier New"/>
+              </a:rPr>
+              <a:t>    keras.Input(shape=(T, F)),</a:t>
+            </a:r>
+          </a:p>
+          <a:p>
+            <a:pPr>
+              <a:defRPr sz="1200" b="0">
+                <a:solidFill>
+                  <a:srgbClr val="F8FAFC"/>
+                </a:solidFill>
+                <a:latin typeface="Courier New"/>
+              </a:defRPr>
+            </a:pPr>
+            <a:r>
+              <a:rPr sz="1200" b="0">
+                <a:solidFill>
+                  <a:srgbClr val="F8FAFC"/>
+                </a:solidFill>
+                <a:latin typeface="Courier New"/>
+              </a:rPr>
+              <a:t>    layers.Conv1D(32, kernel_size=5, activation="relu"),   # padding='valid' por defecto</a:t>
+            </a:r>
+          </a:p>
+          <a:p>
+            <a:pPr>
+              <a:defRPr sz="1200" b="0">
+                <a:solidFill>
+                  <a:srgbClr val="F8FAFC"/>
+                </a:solidFill>
+                <a:latin typeface="Courier New"/>
+              </a:defRPr>
+            </a:pPr>
+            <a:r>
+              <a:rPr sz="1200" b="0">
+                <a:solidFill>
+                  <a:srgbClr val="F8FAFC"/>
+                </a:solidFill>
+                <a:latin typeface="Courier New"/>
+              </a:rPr>
+              <a:t>])</a:t>
+            </a:r>
+          </a:p>
+          <a:p>
+            <a:pPr>
+              <a:defRPr sz="1200" b="0">
+                <a:solidFill>
+                  <a:srgbClr val="F8FAFC"/>
+                </a:solidFill>
+                <a:latin typeface="Courier New"/>
+              </a:defRPr>
+            </a:pPr>
+            <a:r>
+              <a:rPr sz="1200" b="0">
+                <a:solidFill>
+                  <a:srgbClr val="F8FAFC"/>
+                </a:solidFill>
+                <a:latin typeface="Courier New"/>
+              </a:rPr>
+              <a:t>print("salida Conv1D (valid):", conv.output_shape)   # (None, 60, 32)</a:t>
             </a:r>
           </a:p>
         </p:txBody>

--- a/docs/presentaciones/classes/clase-138-1d-cnns-y-wavenet-presentacion.pptx
+++ b/docs/presentaciones/classes/clase-138-1d-cnns-y-wavenet-presentacion.pptx
@@ -3272,7 +3272,7 @@
                 </a:solidFill>
                 <a:latin typeface="Segoe UI"/>
               </a:rPr>
-              <a:t>Parte: 2 — Deep Learning · Fuente: Géron, cap. 15 § Handling Long Sequences + WaveNet paper (van den Oord et al. 2016).  Duración estimada: 60 min.</a:t>
+              <a:t>Parte: 2 — Deep Learning · Fuente: Géron, cap. 15 § Handling Long Sequences + WaveNet paper (van den Oord et al. 2016).  Duración estimada: 60 min. · Nivel: Avanzado</a:t>
             </a:r>
           </a:p>
         </p:txBody>
@@ -3581,7 +3581,7 @@
                 </a:solidFill>
                 <a:latin typeface="Segoe UI"/>
               </a:rPr>
-              <a:t>Parte: 2 — Deep Learning · Fuente: Géron, cap. 15 § Handling Long Sequences + WaveNet paper (van den Oord et al. 2016).  Duración estimada: 60 min.</a:t>
+              <a:t>Parte: 2 — Deep Learning · Fuente: Géron, cap. 15 § Handling Long Sequences + WaveNet paper (van den Oord et al. 2016).  Duración estimada: 60 min. · Nivel: Avanzado</a:t>
             </a:r>
           </a:p>
         </p:txBody>
